--- a/static/guide/04_アプリケーション構成.pptx
+++ b/static/guide/04_アプリケーション構成.pptx
@@ -2065,7 +2065,7 @@
                 <a:ea typeface="Consolas" pitchFamily="34" charset="-122"/>
                 <a:cs typeface="Consolas" pitchFamily="34" charset="-120"/>
               </a:rPr>
-              <a:t>// fun IT club — WG 立ち上げガイド  04</a:t>
+              <a:t>// fun IT club — WG 立ち上げガイド  04 アプリケーション構成</a:t>
             </a:r>
             <a:endParaRPr lang="en-US" sz="1100" dirty="0"/>
           </a:p>

--- a/static/guide/04_アプリケーション構成.pptx
+++ b/static/guide/04_アプリケーション構成.pptx
@@ -6232,7 +6232,7 @@
                 <a:ea typeface="Meiryo" pitchFamily="34" charset="-122"/>
                 <a:cs typeface="Meiryo" pitchFamily="34" charset="-120"/>
               </a:rPr>
-              <a:t>自動（準備中）</a:t>
+              <a:t>自動</a:t>
             </a:r>
             <a:endParaRPr lang="en-US" sz="900" dirty="0"/>
           </a:p>
@@ -6271,7 +6271,7 @@
                 <a:ea typeface="Meiryo" pitchFamily="34" charset="-122"/>
                 <a:cs typeface="Meiryo" pitchFamily="34" charset="-120"/>
               </a:rPr>
-              <a:t>マージすると成果物アプリが動き出す。URL を直接開けば、もう誰でも見られる。リポジトリは非公開のまま。</a:t>
+              <a:t>マージすると homepage に取り込まれて公開される。ソースは非公開のまま。URL 直打ちでは開かず、一覧から辿る。</a:t>
             </a:r>
             <a:endParaRPr lang="en-US" sz="1050" dirty="0"/>
           </a:p>
@@ -9554,7 +9554,7 @@
                 <a:ea typeface="Consolas" pitchFamily="34" charset="-122"/>
                 <a:cs typeface="Consolas" pitchFamily="34" charset="-120"/>
               </a:rPr>
-              <a:t>countdown/</a:t>
+              <a:t>works/  wg/</a:t>
             </a:r>
             <a:endParaRPr lang="en-US" sz="1250" dirty="0"/>
           </a:p>
@@ -9593,7 +9593,7 @@
                 <a:ea typeface="Meiryo" pitchFamily="34" charset="-122"/>
                 <a:cs typeface="Meiryo" pitchFamily="34" charset="-120"/>
               </a:rPr>
-              <a:t>サブアプリの例。成果物の URL から辿る公開ボード</a:t>
+              <a:t>公表した成果物（countdown・fe）と、作っている途中の WG のアプリ</a:t>
             </a:r>
             <a:endParaRPr lang="en-US" sz="1050" dirty="0"/>
           </a:p>
@@ -10440,7 +10440,7 @@
                 <a:ea typeface="Consolas" pitchFamily="34" charset="-122"/>
                 <a:cs typeface="Consolas" pitchFamily="34" charset="-120"/>
               </a:rPr>
-              <a:t>/countdown/</a:t>
+              <a:t>/countdown/  /fe/  /protein/</a:t>
             </a:r>
             <a:endParaRPr lang="en-US" sz="950" dirty="0"/>
           </a:p>
@@ -10479,7 +10479,7 @@
                 <a:ea typeface="Meiryo" pitchFamily="34" charset="-122"/>
                 <a:cs typeface="Meiryo" pitchFamily="34" charset="-120"/>
               </a:rPr>
-              <a:t>サブアプリ。成果物の URL から辿る</a:t>
+              <a:t>サブアプリ。一覧から辿ったときだけ開く</a:t>
             </a:r>
             <a:endParaRPr lang="en-US" sz="850" dirty="0"/>
           </a:p>
@@ -11106,7 +11106,7 @@
                 <a:ea typeface="Meiryo" pitchFamily="34" charset="-122"/>
                 <a:cs typeface="Meiryo" pitchFamily="34" charset="-120"/>
               </a:rPr>
-              <a:t>既定はすべての画面がログイン必須（LoginRequiredMiddleware）。公開ページだけ login_not_required を付けて外してある。</a:t>
+              <a:t>既定はすべての画面がログイン必須。公開ページは login_not_required で外し、サブアプリにはさらに一覧からの通行証が要る（config/gate.py）。</a:t>
             </a:r>
             <a:endParaRPr lang="en-US" sz="1050" dirty="0"/>
           </a:p>
@@ -12071,7 +12071,7 @@
                 <a:ea typeface="Meiryo" pitchFamily="34" charset="-122"/>
                 <a:cs typeface="Meiryo" pitchFamily="34" charset="-120"/>
               </a:rPr>
-              <a:t>ログインは要らない。home/views.py のビューに login_not_required が付いているため。</a:t>
+              <a:t>ログインは要らない。login_not_required が付いているため。サブアプリだけは、このあとに通行証の確認が入る。</a:t>
             </a:r>
             <a:endParaRPr lang="en-US" sz="1100" dirty="0"/>
           </a:p>
@@ -13316,7 +13316,7 @@
                 <a:ea typeface="Consolas" pitchFamily="34" charset="-122"/>
                 <a:cs typeface="Consolas" pitchFamily="34" charset="-120"/>
               </a:rPr>
-              <a:t>home / news / catalog / wgjoin / countdown</a:t>
+              <a:t>home / news / catalog / wgjoin / works / wg</a:t>
             </a:r>
             <a:endParaRPr lang="en-US" sz="1000" dirty="0"/>
           </a:p>

--- a/static/guide/04_アプリケーション構成.pptx
+++ b/static/guide/04_アプリケーション構成.pptx
@@ -2905,7 +2905,7 @@
                 <a:ea typeface="Meiryo" pitchFamily="34" charset="-122"/>
                 <a:cs typeface="Meiryo" pitchFamily="34" charset="-120"/>
               </a:rPr>
-              <a:t>独自ドメインから、2 通に分けて送る</a:t>
+              <a:t>独自ドメインから、要るときだけ送る</a:t>
             </a:r>
             <a:endParaRPr lang="en-US" sz="2600" dirty="0"/>
           </a:p>
@@ -3230,7 +3230,7 @@
                 <a:ea typeface="Meiryo" pitchFamily="34" charset="-122"/>
                 <a:cs typeface="Meiryo" pitchFamily="34" charset="-120"/>
               </a:rPr>
-              <a:t>申し込み 1 件につき 2 通</a:t>
+              <a:t>申し込みは招待だけ</a:t>
             </a:r>
             <a:endParaRPr lang="en-US" sz="1500" dirty="0"/>
           </a:p>
@@ -3273,7 +3273,7 @@
                 <a:ea typeface="Meiryo" pitchFamily="34" charset="-122"/>
                 <a:cs typeface="Meiryo" pitchFamily="34" charset="-120"/>
               </a:rPr>
-              <a:t>事務局あての通知。Reply-To は申込者</a:t>
+              <a:t>招待できたらサイトからは送らない</a:t>
             </a:r>
             <a:endParaRPr lang="en-US" sz="1050" dirty="0"/>
           </a:p>
@@ -3294,7 +3294,7 @@
                 <a:ea typeface="Meiryo" pitchFamily="34" charset="-122"/>
                 <a:cs typeface="Meiryo" pitchFamily="34" charset="-120"/>
               </a:rPr>
-              <a:t>申込者あての控え。Reply-To は事務局</a:t>
+              <a:t>クラスにいる・送れないときは本人に 1 通</a:t>
             </a:r>
             <a:endParaRPr lang="en-US" sz="1050" dirty="0"/>
           </a:p>
@@ -3315,7 +3315,7 @@
                 <a:ea typeface="Meiryo" pitchFamily="34" charset="-122"/>
                 <a:cs typeface="Meiryo" pitchFamily="34" charset="-120"/>
               </a:rPr>
-              <a:t>控えには「心当たりがない場合」の案内を必ず入れる</a:t>
+              <a:t>事務局への通知は送れなかったときだけ</a:t>
             </a:r>
             <a:endParaRPr lang="en-US" sz="1050" dirty="0"/>
           </a:p>
@@ -8356,7 +8356,7 @@
                 <a:ea typeface="Meiryo" pitchFamily="34" charset="-122"/>
                 <a:cs typeface="Meiryo" pitchFamily="34" charset="-120"/>
               </a:rPr>
-              <a:t>Google Classroom</a:t>
+              <a:t>Google Classroom・Chat</a:t>
             </a:r>
             <a:endParaRPr lang="en-US" sz="1050" dirty="0"/>
           </a:p>
@@ -8395,7 +8395,7 @@
                 <a:ea typeface="Meiryo" pitchFamily="34" charset="-122"/>
                 <a:cs typeface="Meiryo" pitchFamily="34" charset="-120"/>
               </a:rPr>
-              <a:t>クラブの名簿を引く</a:t>
+              <a:t>名簿・招待・Chat への追加</a:t>
             </a:r>
             <a:endParaRPr lang="en-US" sz="900" dirty="0"/>
           </a:p>
@@ -9483,7 +9483,7 @@
                 <a:ea typeface="Meiryo" pitchFamily="34" charset="-122"/>
                 <a:cs typeface="Meiryo" pitchFamily="34" charset="-120"/>
               </a:rPr>
-              <a:t>WG への参加。Classroom と GitHub をつなぐ</a:t>
+              <a:t>WG への参加。Classroom・Chat・GitHub をつなぐ</a:t>
             </a:r>
             <a:endParaRPr lang="en-US" sz="1050" dirty="0"/>
           </a:p>
@@ -15883,7 +15883,7 @@
                 <a:ea typeface="Meiryo" pitchFamily="34" charset="-122"/>
                 <a:cs typeface="Meiryo" pitchFamily="34" charset="-120"/>
               </a:rPr>
-              <a:t>署名付きで 1 時間だけ有効。使い捨て。アドレスは入れない</a:t>
+              <a:t>署名付きで 1 時間だけ有効。使い捨て。アドレスは暗号化</a:t>
             </a:r>
             <a:endParaRPr lang="en-US" sz="1000" dirty="0"/>
           </a:p>
@@ -15993,7 +15993,7 @@
                 <a:ea typeface="Meiryo" pitchFamily="34" charset="-122"/>
                 <a:cs typeface="Meiryo" pitchFamily="34" charset="-120"/>
               </a:rPr>
-              <a:t>GitHub でログイン</a:t>
+              <a:t>Chat に追加する</a:t>
             </a:r>
             <a:endParaRPr lang="en-US" sz="1250" dirty="0"/>
           </a:p>
@@ -16032,7 +16032,7 @@
                 <a:ea typeface="Meiryo" pitchFamily="34" charset="-122"/>
                 <a:cs typeface="Meiryo" pitchFamily="34" charset="-120"/>
               </a:rPr>
-              <a:t>GitHub App が WG のチームに追加する。wg- で始まるチームだけ</a:t>
+              <a:t>ボタンを押すと運営の権限で WG のスペースへ。失敗時だけ運営に通知</a:t>
             </a:r>
             <a:endParaRPr lang="en-US" sz="1000" dirty="0"/>
           </a:p>
@@ -16142,7 +16142,7 @@
                 <a:ea typeface="Meiryo" pitchFamily="34" charset="-122"/>
                 <a:cs typeface="Meiryo" pitchFamily="34" charset="-120"/>
               </a:rPr>
-              <a:t>Chat へ案内する</a:t>
+              <a:t>GitHub でログイン</a:t>
             </a:r>
             <a:endParaRPr lang="en-US" sz="1250" dirty="0"/>
           </a:p>
@@ -16181,7 +16181,7 @@
                 <a:ea typeface="Meiryo" pitchFamily="34" charset="-122"/>
                 <a:cs typeface="Meiryo" pitchFamily="34" charset="-120"/>
               </a:rPr>
-              <a:t>スペースのリンクは Classroom の授業にある。サイトは Chat に何もしない</a:t>
+              <a:t>GitHub App が WG のチームに追加する。wg- で始まるチームだけ</a:t>
             </a:r>
             <a:endParaRPr lang="en-US" sz="1000" dirty="0"/>
           </a:p>
@@ -16220,7 +16220,7 @@
                 <a:ea typeface="Meiryo" pitchFamily="34" charset="-122"/>
                 <a:cs typeface="Meiryo" pitchFamily="34" charset="-120"/>
               </a:rPr>
-              <a:t>会員の情報はサイトに持たない。名簿は Classroom、参加の状態は GitHub のチームで分かる。</a:t>
+              <a:t>会員の情報はサイトに持たない。名簿は Classroom、参加の状態は GitHub のチームと Chat で分かる。</a:t>
             </a:r>
             <a:endParaRPr lang="en-US" sz="1050" dirty="0"/>
           </a:p>

--- a/static/guide/04_アプリケーション構成.pptx
+++ b/static/guide/04_アプリケーション構成.pptx
@@ -10440,7 +10440,7 @@
                 <a:ea typeface="Consolas" pitchFamily="34" charset="-122"/>
                 <a:cs typeface="Consolas" pitchFamily="34" charset="-120"/>
               </a:rPr>
-              <a:t>/countdown/  /fe/  /protein/</a:t>
+              <a:t>/&lt;名前&gt;/…</a:t>
             </a:r>
             <a:endParaRPr lang="en-US" sz="950" dirty="0"/>
           </a:p>
@@ -11514,7 +11514,7 @@
                 <a:ea typeface="Meiryo" pitchFamily="34" charset="-122"/>
                 <a:cs typeface="Meiryo" pitchFamily="34" charset="-120"/>
               </a:rPr>
-              <a:t>識別子・名前・説明・状態・アプリの URL・GitHub のチーム・表示順</a:t>
+              <a:t>識別子・名前・説明・状態・アプリの URL・追加リンク・GitHub のチーム・Chat スペース・表示順</a:t>
             </a:r>
             <a:endParaRPr lang="en-US" sz="1000" dirty="0"/>
           </a:p>
